--- a/docs/structure.pptx
+++ b/docs/structure.pptx
@@ -260,7 +260,7 @@
           <a:p>
             <a:fld id="{525C2619-F06C-3D42-8D48-5DBF955DAB6E}" type="datetimeFigureOut">
               <a:rPr lang="ru-RU" smtClean="0"/>
-              <a:t>07.07.2026</a:t>
+              <a:t>30.09.2026</a:t>
             </a:fld>
             <a:endParaRPr lang="ru-RU"/>
           </a:p>
@@ -458,7 +458,7 @@
           <a:p>
             <a:fld id="{525C2619-F06C-3D42-8D48-5DBF955DAB6E}" type="datetimeFigureOut">
               <a:rPr lang="ru-RU" smtClean="0"/>
-              <a:t>07.07.2026</a:t>
+              <a:t>30.09.2026</a:t>
             </a:fld>
             <a:endParaRPr lang="ru-RU"/>
           </a:p>
@@ -666,7 +666,7 @@
           <a:p>
             <a:fld id="{525C2619-F06C-3D42-8D48-5DBF955DAB6E}" type="datetimeFigureOut">
               <a:rPr lang="ru-RU" smtClean="0"/>
-              <a:t>07.07.2026</a:t>
+              <a:t>30.09.2026</a:t>
             </a:fld>
             <a:endParaRPr lang="ru-RU"/>
           </a:p>
@@ -864,7 +864,7 @@
           <a:p>
             <a:fld id="{525C2619-F06C-3D42-8D48-5DBF955DAB6E}" type="datetimeFigureOut">
               <a:rPr lang="ru-RU" smtClean="0"/>
-              <a:t>07.07.2026</a:t>
+              <a:t>30.09.2026</a:t>
             </a:fld>
             <a:endParaRPr lang="ru-RU"/>
           </a:p>
@@ -1139,7 +1139,7 @@
           <a:p>
             <a:fld id="{525C2619-F06C-3D42-8D48-5DBF955DAB6E}" type="datetimeFigureOut">
               <a:rPr lang="ru-RU" smtClean="0"/>
-              <a:t>07.07.2026</a:t>
+              <a:t>30.09.2026</a:t>
             </a:fld>
             <a:endParaRPr lang="ru-RU"/>
           </a:p>
@@ -1404,7 +1404,7 @@
           <a:p>
             <a:fld id="{525C2619-F06C-3D42-8D48-5DBF955DAB6E}" type="datetimeFigureOut">
               <a:rPr lang="ru-RU" smtClean="0"/>
-              <a:t>07.07.2026</a:t>
+              <a:t>30.09.2026</a:t>
             </a:fld>
             <a:endParaRPr lang="ru-RU"/>
           </a:p>
@@ -1816,7 +1816,7 @@
           <a:p>
             <a:fld id="{525C2619-F06C-3D42-8D48-5DBF955DAB6E}" type="datetimeFigureOut">
               <a:rPr lang="ru-RU" smtClean="0"/>
-              <a:t>07.07.2026</a:t>
+              <a:t>30.09.2026</a:t>
             </a:fld>
             <a:endParaRPr lang="ru-RU"/>
           </a:p>
@@ -1957,7 +1957,7 @@
           <a:p>
             <a:fld id="{525C2619-F06C-3D42-8D48-5DBF955DAB6E}" type="datetimeFigureOut">
               <a:rPr lang="ru-RU" smtClean="0"/>
-              <a:t>07.07.2026</a:t>
+              <a:t>30.09.2026</a:t>
             </a:fld>
             <a:endParaRPr lang="ru-RU"/>
           </a:p>
@@ -2070,7 +2070,7 @@
           <a:p>
             <a:fld id="{525C2619-F06C-3D42-8D48-5DBF955DAB6E}" type="datetimeFigureOut">
               <a:rPr lang="ru-RU" smtClean="0"/>
-              <a:t>07.07.2026</a:t>
+              <a:t>30.09.2026</a:t>
             </a:fld>
             <a:endParaRPr lang="ru-RU"/>
           </a:p>
@@ -2381,7 +2381,7 @@
           <a:p>
             <a:fld id="{525C2619-F06C-3D42-8D48-5DBF955DAB6E}" type="datetimeFigureOut">
               <a:rPr lang="ru-RU" smtClean="0"/>
-              <a:t>07.07.2026</a:t>
+              <a:t>30.09.2026</a:t>
             </a:fld>
             <a:endParaRPr lang="ru-RU"/>
           </a:p>
@@ -2669,7 +2669,7 @@
           <a:p>
             <a:fld id="{525C2619-F06C-3D42-8D48-5DBF955DAB6E}" type="datetimeFigureOut">
               <a:rPr lang="ru-RU" smtClean="0"/>
-              <a:t>07.07.2026</a:t>
+              <a:t>30.09.2026</a:t>
             </a:fld>
             <a:endParaRPr lang="ru-RU"/>
           </a:p>
@@ -2910,7 +2910,7 @@
           <a:p>
             <a:fld id="{525C2619-F06C-3D42-8D48-5DBF955DAB6E}" type="datetimeFigureOut">
               <a:rPr lang="ru-RU" smtClean="0"/>
-              <a:t>07.07.2026</a:t>
+              <a:t>30.09.2026</a:t>
             </a:fld>
             <a:endParaRPr lang="ru-RU"/>
           </a:p>
@@ -5648,7 +5648,7 @@
         <p:spPr>
           <a:xfrm>
             <a:off x="374850" y="5283137"/>
-            <a:ext cx="1439393" cy="1200329"/>
+            <a:ext cx="1439393" cy="954107"/>
           </a:xfrm>
           <a:prstGeom prst="rect">
             <a:avLst/>
@@ -5662,28 +5662,28 @@
           <a:lstStyle/>
           <a:p>
             <a:r>
-              <a:rPr lang="en" dirty="0"/>
+              <a:rPr lang="en" sz="1400" dirty="0"/>
               <a:t>Sequential, </a:t>
             </a:r>
           </a:p>
           <a:p>
             <a:r>
-              <a:rPr lang="en" dirty="0"/>
+              <a:rPr lang="en" sz="1400" dirty="0"/>
               <a:t>Dense, </a:t>
             </a:r>
           </a:p>
           <a:p>
             <a:r>
-              <a:rPr lang="en" dirty="0"/>
+              <a:rPr lang="en" sz="1400" dirty="0"/>
               <a:t>Conv2D, </a:t>
             </a:r>
           </a:p>
           <a:p>
             <a:r>
-              <a:rPr lang="en" dirty="0"/>
+              <a:rPr lang="en" sz="1400" dirty="0"/>
               <a:t>Flatten</a:t>
             </a:r>
-            <a:endParaRPr lang="ru-RU" dirty="0"/>
+            <a:endParaRPr lang="ru-RU" sz="1400" dirty="0"/>
           </a:p>
         </p:txBody>
       </p:sp>
@@ -5745,8 +5745,8 @@
         </p:nvSpPr>
         <p:spPr>
           <a:xfrm>
-            <a:off x="232012" y="393825"/>
-            <a:ext cx="3843601" cy="6089641"/>
+            <a:off x="232012" y="393826"/>
+            <a:ext cx="3843601" cy="5927046"/>
           </a:xfrm>
           <a:prstGeom prst="rect">
             <a:avLst/>
@@ -6147,7 +6147,7 @@
         <p:spPr>
           <a:xfrm>
             <a:off x="10407886" y="2162450"/>
-            <a:ext cx="1370247" cy="1200329"/>
+            <a:ext cx="1105046" cy="954107"/>
           </a:xfrm>
           <a:prstGeom prst="rect">
             <a:avLst/>
@@ -6161,32 +6161,32 @@
           <a:lstStyle/>
           <a:p>
             <a:r>
-              <a:rPr lang="en-US" dirty="0"/>
+              <a:rPr lang="en-US" sz="1400" dirty="0"/>
               <a:t>mode_7,</a:t>
             </a:r>
           </a:p>
           <a:p>
             <a:r>
-              <a:rPr lang="en-US" dirty="0"/>
+              <a:rPr lang="en-US" sz="1400" dirty="0"/>
               <a:t>mode_9,</a:t>
             </a:r>
           </a:p>
           <a:p>
             <a:r>
-              <a:rPr lang="en-US" dirty="0" err="1"/>
+              <a:rPr lang="en-US" sz="1400" dirty="0" err="1"/>
               <a:t>mode_mvm</a:t>
             </a:r>
             <a:r>
-              <a:rPr lang="en-US" dirty="0"/>
+              <a:rPr lang="en-US" sz="1400" dirty="0"/>
               <a:t>,</a:t>
             </a:r>
           </a:p>
           <a:p>
             <a:r>
-              <a:rPr lang="en-US" dirty="0" err="1"/>
+              <a:rPr lang="en-US" sz="1400" dirty="0" err="1"/>
               <a:t>mode_core</a:t>
             </a:r>
-            <a:endParaRPr lang="ru-RU" dirty="0"/>
+            <a:endParaRPr lang="ru-RU" sz="1400" dirty="0"/>
           </a:p>
         </p:txBody>
       </p:sp>
@@ -6893,6 +6893,113 @@
             <a:r>
               <a:rPr lang="en" dirty="0"/>
               <a:t>Application</a:t>
+            </a:r>
+            <a:endParaRPr lang="ru-RU" dirty="0"/>
+          </a:p>
+        </p:txBody>
+      </p:sp>
+      <p:sp>
+        <p:nvSpPr>
+          <p:cNvPr id="3" name="TextBox 2">
+            <a:extLst>
+              <a:ext uri="{FF2B5EF4-FFF2-40B4-BE49-F238E27FC236}">
+                <a16:creationId xmlns:a16="http://schemas.microsoft.com/office/drawing/2014/main" id="{FC32F77D-0559-ACB2-B3AE-7721D6EC288C}"/>
+              </a:ext>
+            </a:extLst>
+          </p:cNvPr>
+          <p:cNvSpPr txBox="1"/>
+          <p:nvPr/>
+        </p:nvSpPr>
+        <p:spPr>
+          <a:xfrm>
+            <a:off x="6414747" y="357501"/>
+            <a:ext cx="6673064" cy="1384995"/>
+          </a:xfrm>
+          <a:prstGeom prst="rect">
+            <a:avLst/>
+          </a:prstGeom>
+          <a:noFill/>
+        </p:spPr>
+        <p:txBody>
+          <a:bodyPr wrap="square">
+            <a:spAutoFit/>
+          </a:bodyPr>
+          <a:lstStyle/>
+          <a:p>
+            <a:r>
+              <a:rPr lang="ru-RU" sz="1400" dirty="0" err="1"/>
+              <a:t>read_one_weight</a:t>
+            </a:r>
+            <a:endParaRPr lang="ru-RU" sz="1400" dirty="0"/>
+          </a:p>
+          <a:p>
+            <a:r>
+              <a:rPr lang="ru-RU" sz="1400" dirty="0" err="1"/>
+              <a:t>read_raw_weights</a:t>
+            </a:r>
+            <a:endParaRPr lang="ru-RU" sz="1400" dirty="0"/>
+          </a:p>
+          <a:p>
+            <a:r>
+              <a:rPr lang="ru-RU" sz="1400" dirty="0" err="1"/>
+              <a:t>write_weight</a:t>
+            </a:r>
+            <a:endParaRPr lang="ru-RU" sz="1400" dirty="0"/>
+          </a:p>
+          <a:p>
+            <a:r>
+              <a:rPr lang="ru-RU" sz="1400" dirty="0" err="1"/>
+              <a:t>write_matrix</a:t>
+            </a:r>
+            <a:endParaRPr lang="ru-RU" sz="1400" dirty="0"/>
+          </a:p>
+          <a:p>
+            <a:r>
+              <a:rPr lang="ru-RU" sz="1400" dirty="0" err="1"/>
+              <a:t>multiplication</a:t>
+            </a:r>
+            <a:endParaRPr lang="ru-RU" sz="1400" dirty="0"/>
+          </a:p>
+          <a:p>
+            <a:r>
+              <a:rPr lang="ru-RU" sz="1400" dirty="0" err="1"/>
+              <a:t>dot_product</a:t>
+            </a:r>
+            <a:endParaRPr lang="ru-RU" sz="1400" dirty="0"/>
+          </a:p>
+        </p:txBody>
+      </p:sp>
+      <p:sp>
+        <p:nvSpPr>
+          <p:cNvPr id="9" name="TextBox 8">
+            <a:extLst>
+              <a:ext uri="{FF2B5EF4-FFF2-40B4-BE49-F238E27FC236}">
+                <a16:creationId xmlns:a16="http://schemas.microsoft.com/office/drawing/2014/main" id="{D8C01054-8039-A7EA-67E7-1FFEF91BAF2B}"/>
+              </a:ext>
+            </a:extLst>
+          </p:cNvPr>
+          <p:cNvSpPr txBox="1"/>
+          <p:nvPr/>
+        </p:nvSpPr>
+        <p:spPr>
+          <a:xfrm>
+            <a:off x="9350486" y="635370"/>
+            <a:ext cx="1837380" cy="369332"/>
+          </a:xfrm>
+          <a:prstGeom prst="rect">
+            <a:avLst/>
+          </a:prstGeom>
+          <a:noFill/>
+        </p:spPr>
+        <p:txBody>
+          <a:bodyPr wrap="square">
+            <a:spAutoFit/>
+          </a:bodyPr>
+          <a:lstStyle/>
+          <a:p>
+            <a:r>
+              <a:rPr lang="en" dirty="0"/>
+              <a:t>Simulator</a:t>
             </a:r>
             <a:endParaRPr lang="ru-RU" dirty="0"/>
           </a:p>
